--- a/REFERENCIA/TELA_992PX.pptx
+++ b/REFERENCIA/TELA_992PX.pptx
@@ -6,6 +6,7 @@
   </p:sldMasterIdLst>
   <p:sldIdLst>
     <p:sldId id="257" r:id="rId5"/>
+    <p:sldId id="258" r:id="rId6"/>
   </p:sldIdLst>
   <p:sldSz cx="9144000" cy="5143500" type="screen16x9"/>
   <p:notesSz cx="9144000" cy="6858000"/>
@@ -4225,6 +4226,1438 @@
 </p:sld>
 </file>
 
+<file path=ppt/slides/slide2.xml><?xml version="1.0" encoding="utf-8"?>
+<p:sld xmlns:a="http://schemas.openxmlformats.org/drawingml/2006/main" xmlns:r="http://schemas.openxmlformats.org/officeDocument/2006/relationships" xmlns:p="http://schemas.openxmlformats.org/presentationml/2006/main">
+  <p:cSld>
+    <p:spTree>
+      <p:nvGrpSpPr>
+        <p:cNvPr id="1" name="">
+          <a:extLst>
+            <a:ext uri="{FF2B5EF4-FFF2-40B4-BE49-F238E27FC236}">
+              <a16:creationId xmlns:a16="http://schemas.microsoft.com/office/drawing/2014/main" id="{374E6690-BB04-5F21-3DDC-8517811832F4}"/>
+            </a:ext>
+          </a:extLst>
+        </p:cNvPr>
+        <p:cNvGrpSpPr/>
+        <p:nvPr/>
+      </p:nvGrpSpPr>
+      <p:grpSpPr>
+        <a:xfrm>
+          <a:off x="0" y="0"/>
+          <a:ext cx="0" cy="0"/>
+          <a:chOff x="0" y="0"/>
+          <a:chExt cx="0" cy="0"/>
+        </a:xfrm>
+      </p:grpSpPr>
+      <p:grpSp>
+        <p:nvGrpSpPr>
+          <p:cNvPr id="15" name="Agrupar 14">
+            <a:extLst>
+              <a:ext uri="{FF2B5EF4-FFF2-40B4-BE49-F238E27FC236}">
+                <a16:creationId xmlns:a16="http://schemas.microsoft.com/office/drawing/2014/main" id="{337509DC-BD70-D1B9-B776-041BDE85E85B}"/>
+              </a:ext>
+            </a:extLst>
+          </p:cNvPr>
+          <p:cNvGrpSpPr/>
+          <p:nvPr/>
+        </p:nvGrpSpPr>
+        <p:grpSpPr>
+          <a:xfrm>
+            <a:off x="9400699" y="1340465"/>
+            <a:ext cx="5125529" cy="1460608"/>
+            <a:chOff x="-7239750" y="5151120"/>
+            <a:chExt cx="6858000" cy="647378"/>
+          </a:xfrm>
+        </p:grpSpPr>
+        <p:pic>
+          <p:nvPicPr>
+            <p:cNvPr id="8" name="Imagem 7">
+              <a:extLst>
+                <a:ext uri="{FF2B5EF4-FFF2-40B4-BE49-F238E27FC236}">
+                  <a16:creationId xmlns:a16="http://schemas.microsoft.com/office/drawing/2014/main" id="{6CF95DE6-8C30-26D2-D9F4-9A1DEBC86BDA}"/>
+                </a:ext>
+              </a:extLst>
+            </p:cNvPr>
+            <p:cNvPicPr>
+              <a:picLocks noChangeAspect="1"/>
+            </p:cNvPicPr>
+            <p:nvPr/>
+          </p:nvPicPr>
+          <p:blipFill>
+            <a:blip r:embed="rId2"/>
+            <a:srcRect b="83451"/>
+            <a:stretch>
+              <a:fillRect/>
+            </a:stretch>
+          </p:blipFill>
+          <p:spPr>
+            <a:xfrm>
+              <a:off x="-7239750" y="5151120"/>
+              <a:ext cx="6858000" cy="377952"/>
+            </a:xfrm>
+            <a:prstGeom prst="rect">
+              <a:avLst/>
+            </a:prstGeom>
+          </p:spPr>
+        </p:pic>
+        <p:pic>
+          <p:nvPicPr>
+            <p:cNvPr id="12" name="Imagem 11">
+              <a:extLst>
+                <a:ext uri="{FF2B5EF4-FFF2-40B4-BE49-F238E27FC236}">
+                  <a16:creationId xmlns:a16="http://schemas.microsoft.com/office/drawing/2014/main" id="{30F776CD-0DF3-6591-298B-68A13F0C50F9}"/>
+                </a:ext>
+              </a:extLst>
+            </p:cNvPr>
+            <p:cNvPicPr>
+              <a:picLocks noChangeAspect="1"/>
+            </p:cNvPicPr>
+            <p:nvPr/>
+          </p:nvPicPr>
+          <p:blipFill>
+            <a:blip r:embed="rId2"/>
+            <a:srcRect t="57656" b="30866"/>
+            <a:stretch>
+              <a:fillRect/>
+            </a:stretch>
+          </p:blipFill>
+          <p:spPr>
+            <a:xfrm>
+              <a:off x="-7239750" y="5536370"/>
+              <a:ext cx="6858000" cy="262128"/>
+            </a:xfrm>
+            <a:prstGeom prst="rect">
+              <a:avLst/>
+            </a:prstGeom>
+          </p:spPr>
+        </p:pic>
+      </p:grpSp>
+      <p:sp>
+        <p:nvSpPr>
+          <p:cNvPr id="2" name="Retângulo 1">
+            <a:extLst>
+              <a:ext uri="{FF2B5EF4-FFF2-40B4-BE49-F238E27FC236}">
+                <a16:creationId xmlns:a16="http://schemas.microsoft.com/office/drawing/2014/main" id="{9F0271F4-8A46-F69F-3E68-D86832C2A54C}"/>
+              </a:ext>
+            </a:extLst>
+          </p:cNvPr>
+          <p:cNvSpPr/>
+          <p:nvPr/>
+        </p:nvSpPr>
+        <p:spPr>
+          <a:xfrm>
+            <a:off x="0" y="0"/>
+            <a:ext cx="9144000" cy="9479666"/>
+          </a:xfrm>
+          <a:prstGeom prst="rect">
+            <a:avLst/>
+          </a:prstGeom>
+          <a:solidFill>
+            <a:schemeClr val="bg1"/>
+          </a:solidFill>
+          <a:ln>
+            <a:noFill/>
+          </a:ln>
+        </p:spPr>
+        <p:style>
+          <a:lnRef idx="2">
+            <a:schemeClr val="accent1">
+              <a:shade val="15000"/>
+            </a:schemeClr>
+          </a:lnRef>
+          <a:fillRef idx="1">
+            <a:schemeClr val="accent1"/>
+          </a:fillRef>
+          <a:effectRef idx="0">
+            <a:schemeClr val="accent1"/>
+          </a:effectRef>
+          <a:fontRef idx="minor">
+            <a:schemeClr val="lt1"/>
+          </a:fontRef>
+        </p:style>
+        <p:txBody>
+          <a:bodyPr rtlCol="0" anchor="ctr"/>
+          <a:lstStyle/>
+          <a:p>
+            <a:pPr algn="ctr"/>
+            <a:endParaRPr lang="pt-BR" sz="2400"/>
+          </a:p>
+        </p:txBody>
+      </p:sp>
+      <p:pic>
+        <p:nvPicPr>
+          <p:cNvPr id="4" name="Imagem 3">
+            <a:extLst>
+              <a:ext uri="{FF2B5EF4-FFF2-40B4-BE49-F238E27FC236}">
+                <a16:creationId xmlns:a16="http://schemas.microsoft.com/office/drawing/2014/main" id="{8CBE2500-C278-D6F9-60C6-F6589FD1AB92}"/>
+              </a:ext>
+            </a:extLst>
+          </p:cNvPr>
+          <p:cNvPicPr>
+            <a:picLocks noChangeAspect="1"/>
+          </p:cNvPicPr>
+          <p:nvPr/>
+        </p:nvPicPr>
+        <p:blipFill>
+          <a:blip r:embed="rId3"/>
+          <a:srcRect l="917" t="1291" r="1250" b="78794"/>
+          <a:stretch>
+            <a:fillRect/>
+          </a:stretch>
+        </p:blipFill>
+        <p:spPr>
+          <a:xfrm>
+            <a:off x="99060" y="60960"/>
+            <a:ext cx="7683500" cy="785366"/>
+          </a:xfrm>
+          <a:prstGeom prst="rect">
+            <a:avLst/>
+          </a:prstGeom>
+        </p:spPr>
+      </p:pic>
+      <p:pic>
+        <p:nvPicPr>
+          <p:cNvPr id="17" name="Imagem 16" hidden="1">
+            <a:extLst>
+              <a:ext uri="{FF2B5EF4-FFF2-40B4-BE49-F238E27FC236}">
+                <a16:creationId xmlns:a16="http://schemas.microsoft.com/office/drawing/2014/main" id="{02638E8A-241B-923F-835C-09694FD93453}"/>
+              </a:ext>
+            </a:extLst>
+          </p:cNvPr>
+          <p:cNvPicPr>
+            <a:picLocks noChangeAspect="1"/>
+          </p:cNvPicPr>
+          <p:nvPr/>
+        </p:nvPicPr>
+        <p:blipFill>
+          <a:blip r:embed="rId4"/>
+          <a:srcRect l="94381"/>
+          <a:stretch>
+            <a:fillRect/>
+          </a:stretch>
+        </p:blipFill>
+        <p:spPr>
+          <a:xfrm>
+            <a:off x="7044268" y="880191"/>
+            <a:ext cx="336020" cy="1341102"/>
+          </a:xfrm>
+          <a:prstGeom prst="rect">
+            <a:avLst/>
+          </a:prstGeom>
+        </p:spPr>
+      </p:pic>
+      <p:pic>
+        <p:nvPicPr>
+          <p:cNvPr id="21" name="Imagem 20">
+            <a:extLst>
+              <a:ext uri="{FF2B5EF4-FFF2-40B4-BE49-F238E27FC236}">
+                <a16:creationId xmlns:a16="http://schemas.microsoft.com/office/drawing/2014/main" id="{6442FE55-C896-EDF8-6D1F-E5892C70CCE9}"/>
+              </a:ext>
+            </a:extLst>
+          </p:cNvPr>
+          <p:cNvPicPr>
+            <a:picLocks noChangeAspect="1"/>
+          </p:cNvPicPr>
+          <p:nvPr/>
+        </p:nvPicPr>
+        <p:blipFill>
+          <a:blip r:embed="rId5"/>
+          <a:stretch>
+            <a:fillRect/>
+          </a:stretch>
+        </p:blipFill>
+        <p:spPr>
+          <a:xfrm>
+            <a:off x="502285" y="1942303"/>
+            <a:ext cx="6877050" cy="4071300"/>
+          </a:xfrm>
+          <a:prstGeom prst="rect">
+            <a:avLst/>
+          </a:prstGeom>
+        </p:spPr>
+      </p:pic>
+      <p:pic>
+        <p:nvPicPr>
+          <p:cNvPr id="23" name="Imagem 22" hidden="1">
+            <a:extLst>
+              <a:ext uri="{FF2B5EF4-FFF2-40B4-BE49-F238E27FC236}">
+                <a16:creationId xmlns:a16="http://schemas.microsoft.com/office/drawing/2014/main" id="{E4BB41F8-BAC6-A8B8-5ADC-DE7E2BF2D0B3}"/>
+              </a:ext>
+            </a:extLst>
+          </p:cNvPr>
+          <p:cNvPicPr>
+            <a:picLocks noChangeAspect="1"/>
+          </p:cNvPicPr>
+          <p:nvPr/>
+        </p:nvPicPr>
+        <p:blipFill>
+          <a:blip r:embed="rId6"/>
+          <a:srcRect l="1104" r="-549"/>
+          <a:stretch>
+            <a:fillRect/>
+          </a:stretch>
+        </p:blipFill>
+        <p:spPr>
+          <a:xfrm>
+            <a:off x="503237" y="869723"/>
+            <a:ext cx="6093989" cy="941484"/>
+          </a:xfrm>
+          <a:prstGeom prst="rect">
+            <a:avLst/>
+          </a:prstGeom>
+        </p:spPr>
+      </p:pic>
+      <p:pic>
+        <p:nvPicPr>
+          <p:cNvPr id="25" name="Imagem 24">
+            <a:extLst>
+              <a:ext uri="{FF2B5EF4-FFF2-40B4-BE49-F238E27FC236}">
+                <a16:creationId xmlns:a16="http://schemas.microsoft.com/office/drawing/2014/main" id="{87A03B25-A25E-DC53-6A23-57AFBD56190B}"/>
+              </a:ext>
+            </a:extLst>
+          </p:cNvPr>
+          <p:cNvPicPr>
+            <a:picLocks noChangeAspect="1"/>
+          </p:cNvPicPr>
+          <p:nvPr/>
+        </p:nvPicPr>
+        <p:blipFill>
+          <a:blip r:embed="rId7"/>
+          <a:stretch>
+            <a:fillRect/>
+          </a:stretch>
+        </p:blipFill>
+        <p:spPr>
+          <a:xfrm>
+            <a:off x="503237" y="6144700"/>
+            <a:ext cx="6875327" cy="3334966"/>
+          </a:xfrm>
+          <a:prstGeom prst="rect">
+            <a:avLst/>
+          </a:prstGeom>
+        </p:spPr>
+      </p:pic>
+      <p:sp>
+        <p:nvSpPr>
+          <p:cNvPr id="3" name="Retângulo: Cantos Arredondados 2">
+            <a:extLst>
+              <a:ext uri="{FF2B5EF4-FFF2-40B4-BE49-F238E27FC236}">
+                <a16:creationId xmlns:a16="http://schemas.microsoft.com/office/drawing/2014/main" id="{FA2F9B12-E8BA-DB0E-62BA-4DA43A3BC07F}"/>
+              </a:ext>
+            </a:extLst>
+          </p:cNvPr>
+          <p:cNvSpPr/>
+          <p:nvPr/>
+        </p:nvSpPr>
+        <p:spPr>
+          <a:xfrm>
+            <a:off x="894080" y="945660"/>
+            <a:ext cx="1351280" cy="753842"/>
+          </a:xfrm>
+          <a:prstGeom prst="roundRect">
+            <a:avLst/>
+          </a:prstGeom>
+          <a:solidFill>
+            <a:srgbClr val="9980E3"/>
+          </a:solidFill>
+          <a:ln>
+            <a:noFill/>
+          </a:ln>
+        </p:spPr>
+        <p:style>
+          <a:lnRef idx="2">
+            <a:schemeClr val="accent1">
+              <a:shade val="15000"/>
+            </a:schemeClr>
+          </a:lnRef>
+          <a:fillRef idx="1">
+            <a:schemeClr val="accent1"/>
+          </a:fillRef>
+          <a:effectRef idx="0">
+            <a:schemeClr val="accent1"/>
+          </a:effectRef>
+          <a:fontRef idx="minor">
+            <a:schemeClr val="lt1"/>
+          </a:fontRef>
+        </p:style>
+        <p:txBody>
+          <a:bodyPr rtlCol="0" anchor="ctr"/>
+          <a:lstStyle/>
+          <a:p>
+            <a:pPr algn="ctr"/>
+            <a:endParaRPr lang="pt-BR"/>
+          </a:p>
+        </p:txBody>
+      </p:sp>
+      <p:sp>
+        <p:nvSpPr>
+          <p:cNvPr id="13" name="Elipse 12">
+            <a:extLst>
+              <a:ext uri="{FF2B5EF4-FFF2-40B4-BE49-F238E27FC236}">
+                <a16:creationId xmlns:a16="http://schemas.microsoft.com/office/drawing/2014/main" id="{893F5A45-AEEA-EE52-6A92-A7A4B6A414B7}"/>
+              </a:ext>
+            </a:extLst>
+          </p:cNvPr>
+          <p:cNvSpPr/>
+          <p:nvPr/>
+        </p:nvSpPr>
+        <p:spPr>
+          <a:xfrm>
+            <a:off x="516462" y="1196581"/>
+            <a:ext cx="252000" cy="252000"/>
+          </a:xfrm>
+          <a:prstGeom prst="ellipse">
+            <a:avLst/>
+          </a:prstGeom>
+          <a:solidFill>
+            <a:srgbClr val="FF7BAE"/>
+          </a:solidFill>
+          <a:ln>
+            <a:noFill/>
+          </a:ln>
+        </p:spPr>
+        <p:style>
+          <a:lnRef idx="2">
+            <a:schemeClr val="accent1">
+              <a:shade val="15000"/>
+            </a:schemeClr>
+          </a:lnRef>
+          <a:fillRef idx="1">
+            <a:schemeClr val="accent1"/>
+          </a:fillRef>
+          <a:effectRef idx="0">
+            <a:schemeClr val="accent1"/>
+          </a:effectRef>
+          <a:fontRef idx="minor">
+            <a:schemeClr val="lt1"/>
+          </a:fontRef>
+        </p:style>
+        <p:txBody>
+          <a:bodyPr rtlCol="0" anchor="ctr"/>
+          <a:lstStyle/>
+          <a:p>
+            <a:pPr algn="ctr"/>
+            <a:r>
+              <a:rPr lang="pt-BR" dirty="0">
+                <a:latin typeface="Arial Nova" panose="020B0504020202020204" pitchFamily="34" charset="0"/>
+              </a:rPr>
+              <a:t>‹</a:t>
+            </a:r>
+            <a:endParaRPr lang="pt-BR" dirty="0"/>
+          </a:p>
+        </p:txBody>
+      </p:sp>
+      <p:sp>
+        <p:nvSpPr>
+          <p:cNvPr id="16" name="Elipse 15">
+            <a:extLst>
+              <a:ext uri="{FF2B5EF4-FFF2-40B4-BE49-F238E27FC236}">
+                <a16:creationId xmlns:a16="http://schemas.microsoft.com/office/drawing/2014/main" id="{98C12C12-3E20-94FF-2935-F105D592FE0C}"/>
+              </a:ext>
+            </a:extLst>
+          </p:cNvPr>
+          <p:cNvSpPr/>
+          <p:nvPr/>
+        </p:nvSpPr>
+        <p:spPr>
+          <a:xfrm>
+            <a:off x="7114642" y="1196581"/>
+            <a:ext cx="252000" cy="252000"/>
+          </a:xfrm>
+          <a:prstGeom prst="ellipse">
+            <a:avLst/>
+          </a:prstGeom>
+          <a:solidFill>
+            <a:srgbClr val="FF7BAE"/>
+          </a:solidFill>
+          <a:ln>
+            <a:noFill/>
+          </a:ln>
+        </p:spPr>
+        <p:style>
+          <a:lnRef idx="2">
+            <a:schemeClr val="accent1">
+              <a:shade val="15000"/>
+            </a:schemeClr>
+          </a:lnRef>
+          <a:fillRef idx="1">
+            <a:schemeClr val="accent1"/>
+          </a:fillRef>
+          <a:effectRef idx="0">
+            <a:schemeClr val="accent1"/>
+          </a:effectRef>
+          <a:fontRef idx="minor">
+            <a:schemeClr val="lt1"/>
+          </a:fontRef>
+        </p:style>
+        <p:txBody>
+          <a:bodyPr rtlCol="0" anchor="ctr"/>
+          <a:lstStyle/>
+          <a:p>
+            <a:pPr algn="ctr"/>
+            <a:r>
+              <a:rPr lang="pt-BR" dirty="0">
+                <a:latin typeface="Arial Nova" panose="020B0504020202020204" pitchFamily="34" charset="0"/>
+              </a:rPr>
+              <a:t>›</a:t>
+            </a:r>
+            <a:endParaRPr lang="pt-BR" dirty="0"/>
+          </a:p>
+        </p:txBody>
+      </p:sp>
+      <p:sp>
+        <p:nvSpPr>
+          <p:cNvPr id="19" name="Retângulo: Cantos Arredondados 18">
+            <a:extLst>
+              <a:ext uri="{FF2B5EF4-FFF2-40B4-BE49-F238E27FC236}">
+                <a16:creationId xmlns:a16="http://schemas.microsoft.com/office/drawing/2014/main" id="{615E1585-F1BB-DD88-7FAA-80651C679112}"/>
+              </a:ext>
+            </a:extLst>
+          </p:cNvPr>
+          <p:cNvSpPr/>
+          <p:nvPr/>
+        </p:nvSpPr>
+        <p:spPr>
+          <a:xfrm>
+            <a:off x="2315734" y="945660"/>
+            <a:ext cx="1351280" cy="753842"/>
+          </a:xfrm>
+          <a:prstGeom prst="roundRect">
+            <a:avLst/>
+          </a:prstGeom>
+          <a:solidFill>
+            <a:srgbClr val="9980E3"/>
+          </a:solidFill>
+          <a:ln>
+            <a:noFill/>
+          </a:ln>
+        </p:spPr>
+        <p:style>
+          <a:lnRef idx="2">
+            <a:schemeClr val="accent1">
+              <a:shade val="15000"/>
+            </a:schemeClr>
+          </a:lnRef>
+          <a:fillRef idx="1">
+            <a:schemeClr val="accent1"/>
+          </a:fillRef>
+          <a:effectRef idx="0">
+            <a:schemeClr val="accent1"/>
+          </a:effectRef>
+          <a:fontRef idx="minor">
+            <a:schemeClr val="lt1"/>
+          </a:fontRef>
+        </p:style>
+        <p:txBody>
+          <a:bodyPr rtlCol="0" anchor="ctr"/>
+          <a:lstStyle/>
+          <a:p>
+            <a:pPr algn="ctr"/>
+            <a:endParaRPr lang="pt-BR"/>
+          </a:p>
+        </p:txBody>
+      </p:sp>
+      <p:sp>
+        <p:nvSpPr>
+          <p:cNvPr id="22" name="Retângulo: Cantos Arredondados 21">
+            <a:extLst>
+              <a:ext uri="{FF2B5EF4-FFF2-40B4-BE49-F238E27FC236}">
+                <a16:creationId xmlns:a16="http://schemas.microsoft.com/office/drawing/2014/main" id="{8F35AD70-C81E-BA08-252C-52DD9DC17D09}"/>
+              </a:ext>
+            </a:extLst>
+          </p:cNvPr>
+          <p:cNvSpPr/>
+          <p:nvPr/>
+        </p:nvSpPr>
+        <p:spPr>
+          <a:xfrm>
+            <a:off x="3745653" y="945660"/>
+            <a:ext cx="1351280" cy="753842"/>
+          </a:xfrm>
+          <a:prstGeom prst="roundRect">
+            <a:avLst/>
+          </a:prstGeom>
+          <a:solidFill>
+            <a:srgbClr val="9980E3"/>
+          </a:solidFill>
+          <a:ln>
+            <a:noFill/>
+          </a:ln>
+        </p:spPr>
+        <p:style>
+          <a:lnRef idx="2">
+            <a:schemeClr val="accent1">
+              <a:shade val="15000"/>
+            </a:schemeClr>
+          </a:lnRef>
+          <a:fillRef idx="1">
+            <a:schemeClr val="accent1"/>
+          </a:fillRef>
+          <a:effectRef idx="0">
+            <a:schemeClr val="accent1"/>
+          </a:effectRef>
+          <a:fontRef idx="minor">
+            <a:schemeClr val="lt1"/>
+          </a:fontRef>
+        </p:style>
+        <p:txBody>
+          <a:bodyPr rtlCol="0" anchor="ctr"/>
+          <a:lstStyle/>
+          <a:p>
+            <a:pPr algn="ctr"/>
+            <a:endParaRPr lang="pt-BR"/>
+          </a:p>
+        </p:txBody>
+      </p:sp>
+      <p:sp>
+        <p:nvSpPr>
+          <p:cNvPr id="26" name="Retângulo: Cantos Arredondados 25">
+            <a:extLst>
+              <a:ext uri="{FF2B5EF4-FFF2-40B4-BE49-F238E27FC236}">
+                <a16:creationId xmlns:a16="http://schemas.microsoft.com/office/drawing/2014/main" id="{A1945A62-3160-7085-A1A8-3EFC9EC2028F}"/>
+              </a:ext>
+            </a:extLst>
+          </p:cNvPr>
+          <p:cNvSpPr/>
+          <p:nvPr/>
+        </p:nvSpPr>
+        <p:spPr>
+          <a:xfrm>
+            <a:off x="5175572" y="945660"/>
+            <a:ext cx="1351280" cy="753842"/>
+          </a:xfrm>
+          <a:prstGeom prst="roundRect">
+            <a:avLst/>
+          </a:prstGeom>
+          <a:solidFill>
+            <a:srgbClr val="9980E3"/>
+          </a:solidFill>
+          <a:ln>
+            <a:noFill/>
+          </a:ln>
+        </p:spPr>
+        <p:style>
+          <a:lnRef idx="2">
+            <a:schemeClr val="accent1">
+              <a:shade val="15000"/>
+            </a:schemeClr>
+          </a:lnRef>
+          <a:fillRef idx="1">
+            <a:schemeClr val="accent1"/>
+          </a:fillRef>
+          <a:effectRef idx="0">
+            <a:schemeClr val="accent1"/>
+          </a:effectRef>
+          <a:fontRef idx="minor">
+            <a:schemeClr val="lt1"/>
+          </a:fontRef>
+        </p:style>
+        <p:txBody>
+          <a:bodyPr rtlCol="0" anchor="ctr"/>
+          <a:lstStyle/>
+          <a:p>
+            <a:pPr algn="ctr"/>
+            <a:endParaRPr lang="pt-BR"/>
+          </a:p>
+        </p:txBody>
+      </p:sp>
+      <p:sp>
+        <p:nvSpPr>
+          <p:cNvPr id="28" name="Retângulo: Cantos Arredondados 27">
+            <a:extLst>
+              <a:ext uri="{FF2B5EF4-FFF2-40B4-BE49-F238E27FC236}">
+                <a16:creationId xmlns:a16="http://schemas.microsoft.com/office/drawing/2014/main" id="{DFC5990A-864D-AE52-7437-2AE9BC092F6F}"/>
+              </a:ext>
+            </a:extLst>
+          </p:cNvPr>
+          <p:cNvSpPr/>
+          <p:nvPr/>
+        </p:nvSpPr>
+        <p:spPr>
+          <a:xfrm>
+            <a:off x="6605491" y="942934"/>
+            <a:ext cx="384589" cy="753842"/>
+          </a:xfrm>
+          <a:prstGeom prst="roundRect">
+            <a:avLst/>
+          </a:prstGeom>
+          <a:solidFill>
+            <a:srgbClr val="9980E3"/>
+          </a:solidFill>
+          <a:ln>
+            <a:noFill/>
+          </a:ln>
+        </p:spPr>
+        <p:style>
+          <a:lnRef idx="2">
+            <a:schemeClr val="accent1">
+              <a:shade val="15000"/>
+            </a:schemeClr>
+          </a:lnRef>
+          <a:fillRef idx="1">
+            <a:schemeClr val="accent1"/>
+          </a:fillRef>
+          <a:effectRef idx="0">
+            <a:schemeClr val="accent1"/>
+          </a:effectRef>
+          <a:fontRef idx="minor">
+            <a:schemeClr val="lt1"/>
+          </a:fontRef>
+        </p:style>
+        <p:txBody>
+          <a:bodyPr rtlCol="0" anchor="ctr"/>
+          <a:lstStyle/>
+          <a:p>
+            <a:pPr algn="ctr"/>
+            <a:endParaRPr lang="pt-BR" dirty="0"/>
+          </a:p>
+        </p:txBody>
+      </p:sp>
+      <p:sp>
+        <p:nvSpPr>
+          <p:cNvPr id="30" name="Retângulo 29">
+            <a:extLst>
+              <a:ext uri="{FF2B5EF4-FFF2-40B4-BE49-F238E27FC236}">
+                <a16:creationId xmlns:a16="http://schemas.microsoft.com/office/drawing/2014/main" id="{C06580F0-BAB7-AFCD-90C9-56EFF0DB00EA}"/>
+              </a:ext>
+            </a:extLst>
+          </p:cNvPr>
+          <p:cNvSpPr/>
+          <p:nvPr/>
+        </p:nvSpPr>
+        <p:spPr>
+          <a:xfrm>
+            <a:off x="6738080" y="941600"/>
+            <a:ext cx="252000" cy="753842"/>
+          </a:xfrm>
+          <a:prstGeom prst="rect">
+            <a:avLst/>
+          </a:prstGeom>
+          <a:solidFill>
+            <a:srgbClr val="9980E3"/>
+          </a:solidFill>
+          <a:ln>
+            <a:noFill/>
+          </a:ln>
+        </p:spPr>
+        <p:style>
+          <a:lnRef idx="2">
+            <a:schemeClr val="accent1">
+              <a:shade val="15000"/>
+            </a:schemeClr>
+          </a:lnRef>
+          <a:fillRef idx="1">
+            <a:schemeClr val="accent1"/>
+          </a:fillRef>
+          <a:effectRef idx="0">
+            <a:schemeClr val="accent1"/>
+          </a:effectRef>
+          <a:fontRef idx="minor">
+            <a:schemeClr val="lt1"/>
+          </a:fontRef>
+        </p:style>
+        <p:txBody>
+          <a:bodyPr rtlCol="0" anchor="ctr"/>
+          <a:lstStyle/>
+          <a:p>
+            <a:pPr algn="ctr"/>
+            <a:endParaRPr lang="pt-BR" dirty="0"/>
+          </a:p>
+        </p:txBody>
+      </p:sp>
+      <p:sp>
+        <p:nvSpPr>
+          <p:cNvPr id="32" name="Retângulo 31">
+            <a:extLst>
+              <a:ext uri="{FF2B5EF4-FFF2-40B4-BE49-F238E27FC236}">
+                <a16:creationId xmlns:a16="http://schemas.microsoft.com/office/drawing/2014/main" id="{25CFAD27-3335-7FFF-C07D-3A4875A8870D}"/>
+              </a:ext>
+            </a:extLst>
+          </p:cNvPr>
+          <p:cNvSpPr/>
+          <p:nvPr/>
+        </p:nvSpPr>
+        <p:spPr>
+          <a:xfrm>
+            <a:off x="768462" y="5019294"/>
+            <a:ext cx="1311798" cy="320040"/>
+          </a:xfrm>
+          <a:prstGeom prst="rect">
+            <a:avLst/>
+          </a:prstGeom>
+          <a:solidFill>
+            <a:srgbClr val="FFFFFF"/>
+          </a:solidFill>
+          <a:ln>
+            <a:noFill/>
+          </a:ln>
+        </p:spPr>
+        <p:style>
+          <a:lnRef idx="2">
+            <a:schemeClr val="accent1">
+              <a:shade val="15000"/>
+            </a:schemeClr>
+          </a:lnRef>
+          <a:fillRef idx="1">
+            <a:schemeClr val="accent1"/>
+          </a:fillRef>
+          <a:effectRef idx="0">
+            <a:schemeClr val="accent1"/>
+          </a:effectRef>
+          <a:fontRef idx="minor">
+            <a:schemeClr val="lt1"/>
+          </a:fontRef>
+        </p:style>
+        <p:txBody>
+          <a:bodyPr rtlCol="0" anchor="ctr"/>
+          <a:lstStyle/>
+          <a:p>
+            <a:pPr algn="ctr"/>
+            <a:endParaRPr lang="pt-BR"/>
+          </a:p>
+        </p:txBody>
+      </p:sp>
+      <p:sp>
+        <p:nvSpPr>
+          <p:cNvPr id="34" name="Retângulo 33">
+            <a:extLst>
+              <a:ext uri="{FF2B5EF4-FFF2-40B4-BE49-F238E27FC236}">
+                <a16:creationId xmlns:a16="http://schemas.microsoft.com/office/drawing/2014/main" id="{FE7C3F0B-F134-9DAA-AC72-86F14C2AF8B2}"/>
+              </a:ext>
+            </a:extLst>
+          </p:cNvPr>
+          <p:cNvSpPr/>
+          <p:nvPr/>
+        </p:nvSpPr>
+        <p:spPr>
+          <a:xfrm>
+            <a:off x="2433855" y="5019294"/>
+            <a:ext cx="1311798" cy="320040"/>
+          </a:xfrm>
+          <a:prstGeom prst="rect">
+            <a:avLst/>
+          </a:prstGeom>
+          <a:solidFill>
+            <a:srgbClr val="FFFFFF"/>
+          </a:solidFill>
+          <a:ln>
+            <a:noFill/>
+          </a:ln>
+        </p:spPr>
+        <p:style>
+          <a:lnRef idx="2">
+            <a:schemeClr val="accent1">
+              <a:shade val="15000"/>
+            </a:schemeClr>
+          </a:lnRef>
+          <a:fillRef idx="1">
+            <a:schemeClr val="accent1"/>
+          </a:fillRef>
+          <a:effectRef idx="0">
+            <a:schemeClr val="accent1"/>
+          </a:effectRef>
+          <a:fontRef idx="minor">
+            <a:schemeClr val="lt1"/>
+          </a:fontRef>
+        </p:style>
+        <p:txBody>
+          <a:bodyPr rtlCol="0" anchor="ctr"/>
+          <a:lstStyle/>
+          <a:p>
+            <a:pPr algn="ctr"/>
+            <a:endParaRPr lang="pt-BR"/>
+          </a:p>
+        </p:txBody>
+      </p:sp>
+      <p:sp>
+        <p:nvSpPr>
+          <p:cNvPr id="36" name="Retângulo 35">
+            <a:extLst>
+              <a:ext uri="{FF2B5EF4-FFF2-40B4-BE49-F238E27FC236}">
+                <a16:creationId xmlns:a16="http://schemas.microsoft.com/office/drawing/2014/main" id="{97F4E362-A9B4-7BC4-4ED5-4865C28EB282}"/>
+              </a:ext>
+            </a:extLst>
+          </p:cNvPr>
+          <p:cNvSpPr/>
+          <p:nvPr/>
+        </p:nvSpPr>
+        <p:spPr>
+          <a:xfrm>
+            <a:off x="4086551" y="5019294"/>
+            <a:ext cx="1311798" cy="320040"/>
+          </a:xfrm>
+          <a:prstGeom prst="rect">
+            <a:avLst/>
+          </a:prstGeom>
+          <a:solidFill>
+            <a:srgbClr val="FFFFFF"/>
+          </a:solidFill>
+          <a:ln>
+            <a:noFill/>
+          </a:ln>
+        </p:spPr>
+        <p:style>
+          <a:lnRef idx="2">
+            <a:schemeClr val="accent1">
+              <a:shade val="15000"/>
+            </a:schemeClr>
+          </a:lnRef>
+          <a:fillRef idx="1">
+            <a:schemeClr val="accent1"/>
+          </a:fillRef>
+          <a:effectRef idx="0">
+            <a:schemeClr val="accent1"/>
+          </a:effectRef>
+          <a:fontRef idx="minor">
+            <a:schemeClr val="lt1"/>
+          </a:fontRef>
+        </p:style>
+        <p:txBody>
+          <a:bodyPr rtlCol="0" anchor="ctr"/>
+          <a:lstStyle/>
+          <a:p>
+            <a:pPr algn="ctr"/>
+            <a:endParaRPr lang="pt-BR"/>
+          </a:p>
+        </p:txBody>
+      </p:sp>
+      <p:sp>
+        <p:nvSpPr>
+          <p:cNvPr id="38" name="Retângulo 37">
+            <a:extLst>
+              <a:ext uri="{FF2B5EF4-FFF2-40B4-BE49-F238E27FC236}">
+                <a16:creationId xmlns:a16="http://schemas.microsoft.com/office/drawing/2014/main" id="{0029B92D-C36F-9DAB-CAE3-A13707177C87}"/>
+              </a:ext>
+            </a:extLst>
+          </p:cNvPr>
+          <p:cNvSpPr/>
+          <p:nvPr/>
+        </p:nvSpPr>
+        <p:spPr>
+          <a:xfrm>
+            <a:off x="5704156" y="5019294"/>
+            <a:ext cx="1311798" cy="320040"/>
+          </a:xfrm>
+          <a:prstGeom prst="rect">
+            <a:avLst/>
+          </a:prstGeom>
+          <a:solidFill>
+            <a:srgbClr val="FFFFFF"/>
+          </a:solidFill>
+          <a:ln>
+            <a:noFill/>
+          </a:ln>
+        </p:spPr>
+        <p:style>
+          <a:lnRef idx="2">
+            <a:schemeClr val="accent1">
+              <a:shade val="15000"/>
+            </a:schemeClr>
+          </a:lnRef>
+          <a:fillRef idx="1">
+            <a:schemeClr val="accent1"/>
+          </a:fillRef>
+          <a:effectRef idx="0">
+            <a:schemeClr val="accent1"/>
+          </a:effectRef>
+          <a:fontRef idx="minor">
+            <a:schemeClr val="lt1"/>
+          </a:fontRef>
+        </p:style>
+        <p:txBody>
+          <a:bodyPr rtlCol="0" anchor="ctr"/>
+          <a:lstStyle/>
+          <a:p>
+            <a:pPr algn="ctr"/>
+            <a:endParaRPr lang="pt-BR"/>
+          </a:p>
+        </p:txBody>
+      </p:sp>
+      <p:sp>
+        <p:nvSpPr>
+          <p:cNvPr id="40" name="Retângulo 39">
+            <a:extLst>
+              <a:ext uri="{FF2B5EF4-FFF2-40B4-BE49-F238E27FC236}">
+                <a16:creationId xmlns:a16="http://schemas.microsoft.com/office/drawing/2014/main" id="{27009D0C-9A2B-BD46-440E-22F315305A3D}"/>
+              </a:ext>
+            </a:extLst>
+          </p:cNvPr>
+          <p:cNvSpPr/>
+          <p:nvPr/>
+        </p:nvSpPr>
+        <p:spPr>
+          <a:xfrm>
+            <a:off x="831088" y="4390273"/>
+            <a:ext cx="505968" cy="441961"/>
+          </a:xfrm>
+          <a:prstGeom prst="rect">
+            <a:avLst/>
+          </a:prstGeom>
+          <a:solidFill>
+            <a:srgbClr val="FFFFFF"/>
+          </a:solidFill>
+          <a:ln>
+            <a:noFill/>
+          </a:ln>
+        </p:spPr>
+        <p:style>
+          <a:lnRef idx="2">
+            <a:schemeClr val="accent1">
+              <a:shade val="15000"/>
+            </a:schemeClr>
+          </a:lnRef>
+          <a:fillRef idx="1">
+            <a:schemeClr val="accent1"/>
+          </a:fillRef>
+          <a:effectRef idx="0">
+            <a:schemeClr val="accent1"/>
+          </a:effectRef>
+          <a:fontRef idx="minor">
+            <a:schemeClr val="lt1"/>
+          </a:fontRef>
+        </p:style>
+        <p:txBody>
+          <a:bodyPr rtlCol="0" anchor="ctr"/>
+          <a:lstStyle/>
+          <a:p>
+            <a:pPr algn="ctr"/>
+            <a:endParaRPr lang="pt-BR"/>
+          </a:p>
+        </p:txBody>
+      </p:sp>
+      <p:sp>
+        <p:nvSpPr>
+          <p:cNvPr id="42" name="Retângulo 41">
+            <a:extLst>
+              <a:ext uri="{FF2B5EF4-FFF2-40B4-BE49-F238E27FC236}">
+                <a16:creationId xmlns:a16="http://schemas.microsoft.com/office/drawing/2014/main" id="{DBD82016-8D8A-3CB6-C9E5-9D81F695FC16}"/>
+              </a:ext>
+            </a:extLst>
+          </p:cNvPr>
+          <p:cNvSpPr/>
+          <p:nvPr/>
+        </p:nvSpPr>
+        <p:spPr>
+          <a:xfrm>
+            <a:off x="4066032" y="4390273"/>
+            <a:ext cx="505968" cy="441961"/>
+          </a:xfrm>
+          <a:prstGeom prst="rect">
+            <a:avLst/>
+          </a:prstGeom>
+          <a:solidFill>
+            <a:srgbClr val="FFFFFF"/>
+          </a:solidFill>
+          <a:ln>
+            <a:noFill/>
+          </a:ln>
+        </p:spPr>
+        <p:style>
+          <a:lnRef idx="2">
+            <a:schemeClr val="accent1">
+              <a:shade val="15000"/>
+            </a:schemeClr>
+          </a:lnRef>
+          <a:fillRef idx="1">
+            <a:schemeClr val="accent1"/>
+          </a:fillRef>
+          <a:effectRef idx="0">
+            <a:schemeClr val="accent1"/>
+          </a:effectRef>
+          <a:fontRef idx="minor">
+            <a:schemeClr val="lt1"/>
+          </a:fontRef>
+        </p:style>
+        <p:txBody>
+          <a:bodyPr rtlCol="0" anchor="ctr"/>
+          <a:lstStyle/>
+          <a:p>
+            <a:pPr algn="ctr"/>
+            <a:endParaRPr lang="pt-BR"/>
+          </a:p>
+        </p:txBody>
+      </p:sp>
+      <p:sp>
+        <p:nvSpPr>
+          <p:cNvPr id="44" name="Retângulo 43">
+            <a:extLst>
+              <a:ext uri="{FF2B5EF4-FFF2-40B4-BE49-F238E27FC236}">
+                <a16:creationId xmlns:a16="http://schemas.microsoft.com/office/drawing/2014/main" id="{BD7243F4-1D26-4A08-818B-A123D1AE99AE}"/>
+              </a:ext>
+            </a:extLst>
+          </p:cNvPr>
+          <p:cNvSpPr/>
+          <p:nvPr/>
+        </p:nvSpPr>
+        <p:spPr>
+          <a:xfrm>
+            <a:off x="5722683" y="4390273"/>
+            <a:ext cx="505968" cy="441961"/>
+          </a:xfrm>
+          <a:prstGeom prst="rect">
+            <a:avLst/>
+          </a:prstGeom>
+          <a:solidFill>
+            <a:srgbClr val="FFFFFF"/>
+          </a:solidFill>
+          <a:ln>
+            <a:noFill/>
+          </a:ln>
+        </p:spPr>
+        <p:style>
+          <a:lnRef idx="2">
+            <a:schemeClr val="accent1">
+              <a:shade val="15000"/>
+            </a:schemeClr>
+          </a:lnRef>
+          <a:fillRef idx="1">
+            <a:schemeClr val="accent1"/>
+          </a:fillRef>
+          <a:effectRef idx="0">
+            <a:schemeClr val="accent1"/>
+          </a:effectRef>
+          <a:fontRef idx="minor">
+            <a:schemeClr val="lt1"/>
+          </a:fontRef>
+        </p:style>
+        <p:txBody>
+          <a:bodyPr rtlCol="0" anchor="ctr"/>
+          <a:lstStyle/>
+          <a:p>
+            <a:pPr algn="ctr"/>
+            <a:endParaRPr lang="pt-BR"/>
+          </a:p>
+        </p:txBody>
+      </p:sp>
+      <p:sp>
+        <p:nvSpPr>
+          <p:cNvPr id="46" name="Retângulo: Cantos Arredondados 45">
+            <a:extLst>
+              <a:ext uri="{FF2B5EF4-FFF2-40B4-BE49-F238E27FC236}">
+                <a16:creationId xmlns:a16="http://schemas.microsoft.com/office/drawing/2014/main" id="{D10B0E79-B52E-74BA-8BF1-D9E5ED5C1F3C}"/>
+              </a:ext>
+            </a:extLst>
+          </p:cNvPr>
+          <p:cNvSpPr/>
+          <p:nvPr/>
+        </p:nvSpPr>
+        <p:spPr>
+          <a:xfrm>
+            <a:off x="6071616" y="7680959"/>
+            <a:ext cx="786384" cy="256033"/>
+          </a:xfrm>
+          <a:prstGeom prst="roundRect">
+            <a:avLst/>
+          </a:prstGeom>
+          <a:solidFill>
+            <a:schemeClr val="bg1">
+              <a:lumMod val="95000"/>
+            </a:schemeClr>
+          </a:solidFill>
+          <a:ln>
+            <a:solidFill>
+              <a:schemeClr val="tx1">
+                <a:lumMod val="50000"/>
+                <a:lumOff val="50000"/>
+              </a:schemeClr>
+            </a:solidFill>
+          </a:ln>
+        </p:spPr>
+        <p:style>
+          <a:lnRef idx="2">
+            <a:schemeClr val="accent1">
+              <a:shade val="15000"/>
+            </a:schemeClr>
+          </a:lnRef>
+          <a:fillRef idx="1">
+            <a:schemeClr val="accent1"/>
+          </a:fillRef>
+          <a:effectRef idx="0">
+            <a:schemeClr val="accent1"/>
+          </a:effectRef>
+          <a:fontRef idx="minor">
+            <a:schemeClr val="lt1"/>
+          </a:fontRef>
+        </p:style>
+        <p:txBody>
+          <a:bodyPr rtlCol="0" anchor="ctr"/>
+          <a:lstStyle/>
+          <a:p>
+            <a:pPr algn="ctr"/>
+            <a:r>
+              <a:rPr lang="pt-BR" sz="1200" dirty="0">
+                <a:solidFill>
+                  <a:sysClr val="windowText" lastClr="000000"/>
+                </a:solidFill>
+              </a:rPr>
+              <a:t>logo</a:t>
+            </a:r>
+          </a:p>
+        </p:txBody>
+      </p:sp>
+      <p:sp>
+        <p:nvSpPr>
+          <p:cNvPr id="50" name="Retângulo: Cantos Arredondados 49">
+            <a:extLst>
+              <a:ext uri="{FF2B5EF4-FFF2-40B4-BE49-F238E27FC236}">
+                <a16:creationId xmlns:a16="http://schemas.microsoft.com/office/drawing/2014/main" id="{06BEB8F2-FF37-EE0E-8235-5CE522515DA7}"/>
+              </a:ext>
+            </a:extLst>
+          </p:cNvPr>
+          <p:cNvSpPr/>
+          <p:nvPr/>
+        </p:nvSpPr>
+        <p:spPr>
+          <a:xfrm>
+            <a:off x="6918960" y="7680959"/>
+            <a:ext cx="442277" cy="256033"/>
+          </a:xfrm>
+          <a:prstGeom prst="roundRect">
+            <a:avLst/>
+          </a:prstGeom>
+          <a:solidFill>
+            <a:schemeClr val="bg1">
+              <a:lumMod val="95000"/>
+            </a:schemeClr>
+          </a:solidFill>
+          <a:ln>
+            <a:solidFill>
+              <a:schemeClr val="tx1">
+                <a:lumMod val="50000"/>
+                <a:lumOff val="50000"/>
+              </a:schemeClr>
+            </a:solidFill>
+          </a:ln>
+        </p:spPr>
+        <p:style>
+          <a:lnRef idx="2">
+            <a:schemeClr val="accent1">
+              <a:shade val="15000"/>
+            </a:schemeClr>
+          </a:lnRef>
+          <a:fillRef idx="1">
+            <a:schemeClr val="accent1"/>
+          </a:fillRef>
+          <a:effectRef idx="0">
+            <a:schemeClr val="accent1"/>
+          </a:effectRef>
+          <a:fontRef idx="minor">
+            <a:schemeClr val="lt1"/>
+          </a:fontRef>
+        </p:style>
+        <p:txBody>
+          <a:bodyPr rtlCol="0" anchor="ctr"/>
+          <a:lstStyle/>
+          <a:p>
+            <a:pPr algn="ctr"/>
+            <a:r>
+              <a:rPr lang="pt-BR" sz="1200" dirty="0">
+                <a:solidFill>
+                  <a:sysClr val="windowText" lastClr="000000"/>
+                </a:solidFill>
+              </a:rPr>
+              <a:t>...</a:t>
+            </a:r>
+          </a:p>
+        </p:txBody>
+      </p:sp>
+      <p:sp>
+        <p:nvSpPr>
+          <p:cNvPr id="5" name="Retângulo 4">
+            <a:extLst>
+              <a:ext uri="{FF2B5EF4-FFF2-40B4-BE49-F238E27FC236}">
+                <a16:creationId xmlns:a16="http://schemas.microsoft.com/office/drawing/2014/main" id="{6C91E9C1-2359-50B7-318B-76E6FB87A161}"/>
+              </a:ext>
+            </a:extLst>
+          </p:cNvPr>
+          <p:cNvSpPr/>
+          <p:nvPr/>
+        </p:nvSpPr>
+        <p:spPr>
+          <a:xfrm>
+            <a:off x="0" y="-1"/>
+            <a:ext cx="9144000" cy="9479665"/>
+          </a:xfrm>
+          <a:prstGeom prst="rect">
+            <a:avLst/>
+          </a:prstGeom>
+          <a:noFill/>
+          <a:ln>
+            <a:solidFill>
+              <a:srgbClr val="00B0F0"/>
+            </a:solidFill>
+            <a:prstDash val="dash"/>
+          </a:ln>
+        </p:spPr>
+        <p:style>
+          <a:lnRef idx="2">
+            <a:schemeClr val="accent1">
+              <a:shade val="15000"/>
+            </a:schemeClr>
+          </a:lnRef>
+          <a:fillRef idx="1">
+            <a:schemeClr val="accent1"/>
+          </a:fillRef>
+          <a:effectRef idx="0">
+            <a:schemeClr val="accent1"/>
+          </a:effectRef>
+          <a:fontRef idx="minor">
+            <a:schemeClr val="lt1"/>
+          </a:fontRef>
+        </p:style>
+        <p:txBody>
+          <a:bodyPr rtlCol="0" anchor="ctr"/>
+          <a:lstStyle/>
+          <a:p>
+            <a:pPr algn="ctr"/>
+            <a:endParaRPr lang="pt-BR"/>
+          </a:p>
+        </p:txBody>
+      </p:sp>
+      <p:sp>
+        <p:nvSpPr>
+          <p:cNvPr id="6" name="CaixaDeTexto 5">
+            <a:extLst>
+              <a:ext uri="{FF2B5EF4-FFF2-40B4-BE49-F238E27FC236}">
+                <a16:creationId xmlns:a16="http://schemas.microsoft.com/office/drawing/2014/main" id="{9CEFC5D1-38DF-B83E-2404-CA9E5B73A16E}"/>
+              </a:ext>
+            </a:extLst>
+          </p:cNvPr>
+          <p:cNvSpPr txBox="1"/>
+          <p:nvPr/>
+        </p:nvSpPr>
+        <p:spPr>
+          <a:xfrm>
+            <a:off x="-1673769" y="0"/>
+            <a:ext cx="1624239" cy="261610"/>
+          </a:xfrm>
+          <a:prstGeom prst="rect">
+            <a:avLst/>
+          </a:prstGeom>
+          <a:noFill/>
+        </p:spPr>
+        <p:txBody>
+          <a:bodyPr wrap="square" rtlCol="0">
+            <a:spAutoFit/>
+          </a:bodyPr>
+          <a:lstStyle/>
+          <a:p>
+            <a:pPr algn="r"/>
+            <a:r>
+              <a:rPr lang="pt-BR" sz="1100" dirty="0"/>
+              <a:t>app-</a:t>
+            </a:r>
+            <a:r>
+              <a:rPr lang="pt-BR" sz="1100" dirty="0" err="1"/>
+              <a:t>shel</a:t>
+            </a:r>
+            <a:endParaRPr lang="pt-BR" sz="1100" dirty="0"/>
+          </a:p>
+        </p:txBody>
+      </p:sp>
+      <p:sp>
+        <p:nvSpPr>
+          <p:cNvPr id="7" name="Retângulo 6">
+            <a:extLst>
+              <a:ext uri="{FF2B5EF4-FFF2-40B4-BE49-F238E27FC236}">
+                <a16:creationId xmlns:a16="http://schemas.microsoft.com/office/drawing/2014/main" id="{5E91023C-2386-23EE-C69F-11A3B605F388}"/>
+              </a:ext>
+            </a:extLst>
+          </p:cNvPr>
+          <p:cNvSpPr/>
+          <p:nvPr/>
+        </p:nvSpPr>
+        <p:spPr>
+          <a:xfrm>
+            <a:off x="99060" y="60960"/>
+            <a:ext cx="8945880" cy="785366"/>
+          </a:xfrm>
+          <a:prstGeom prst="rect">
+            <a:avLst/>
+          </a:prstGeom>
+          <a:solidFill>
+            <a:srgbClr val="72C3E8">
+              <a:alpha val="41176"/>
+            </a:srgbClr>
+          </a:solidFill>
+          <a:ln>
+            <a:noFill/>
+          </a:ln>
+        </p:spPr>
+        <p:style>
+          <a:lnRef idx="2">
+            <a:schemeClr val="accent1">
+              <a:shade val="15000"/>
+            </a:schemeClr>
+          </a:lnRef>
+          <a:fillRef idx="1">
+            <a:schemeClr val="accent1"/>
+          </a:fillRef>
+          <a:effectRef idx="0">
+            <a:schemeClr val="accent1"/>
+          </a:effectRef>
+          <a:fontRef idx="minor">
+            <a:schemeClr val="lt1"/>
+          </a:fontRef>
+        </p:style>
+        <p:txBody>
+          <a:bodyPr rtlCol="0" anchor="ctr"/>
+          <a:lstStyle/>
+          <a:p>
+            <a:pPr algn="ctr"/>
+            <a:endParaRPr lang="pt-BR"/>
+          </a:p>
+        </p:txBody>
+      </p:sp>
+      <p:sp>
+        <p:nvSpPr>
+          <p:cNvPr id="9" name="CaixaDeTexto 8">
+            <a:extLst>
+              <a:ext uri="{FF2B5EF4-FFF2-40B4-BE49-F238E27FC236}">
+                <a16:creationId xmlns:a16="http://schemas.microsoft.com/office/drawing/2014/main" id="{CC46199B-62EE-608B-B8BF-12B7F33031F1}"/>
+              </a:ext>
+            </a:extLst>
+          </p:cNvPr>
+          <p:cNvSpPr txBox="1"/>
+          <p:nvPr/>
+        </p:nvSpPr>
+        <p:spPr>
+          <a:xfrm>
+            <a:off x="7656883" y="60958"/>
+            <a:ext cx="1412205" cy="261610"/>
+          </a:xfrm>
+          <a:prstGeom prst="rect">
+            <a:avLst/>
+          </a:prstGeom>
+          <a:noFill/>
+        </p:spPr>
+        <p:txBody>
+          <a:bodyPr wrap="square" rtlCol="0">
+            <a:spAutoFit/>
+          </a:bodyPr>
+          <a:lstStyle/>
+          <a:p>
+            <a:pPr algn="r"/>
+            <a:r>
+              <a:rPr lang="pt-BR" sz="1100" dirty="0"/>
+              <a:t>top-header</a:t>
+            </a:r>
+          </a:p>
+        </p:txBody>
+      </p:sp>
+    </p:spTree>
+    <p:extLst>
+      <p:ext uri="{BB962C8B-B14F-4D97-AF65-F5344CB8AC3E}">
+        <p14:creationId xmlns:p14="http://schemas.microsoft.com/office/powerpoint/2010/main" val="3683797401"/>
+      </p:ext>
+    </p:extLst>
+  </p:cSld>
+  <p:clrMapOvr>
+    <a:masterClrMapping/>
+  </p:clrMapOvr>
+</p:sld>
+</file>
+
 <file path=ppt/theme/theme1.xml><?xml version="1.0" encoding="utf-8"?>
 <a:theme xmlns:a="http://schemas.openxmlformats.org/drawingml/2006/main" name="Tema do Office">
   <a:themeElements>
@@ -4541,12 +5974,11 @@
 </file>
 
 <file path=customXml/item1.xml><?xml version="1.0" encoding="utf-8"?>
-<?mso-contentType ?>
-<FormTemplates xmlns="http://schemas.microsoft.com/sharepoint/v3/contenttype/forms">
-  <Display>DocumentLibraryForm</Display>
-  <Edit>DocumentLibraryForm</Edit>
-  <New>DocumentLibraryForm</New>
-</FormTemplates>
+<p:properties xmlns:p="http://schemas.microsoft.com/office/2006/metadata/properties" xmlns:xsi="http://www.w3.org/2001/XMLSchema-instance" xmlns:pc="http://schemas.microsoft.com/office/infopath/2007/PartnerControls">
+  <documentManagement>
+    <_activity xmlns="b3641aaf-c155-40cf-a9a2-b9dc2a613d71" xsi:nil="true"/>
+  </documentManagement>
+</p:properties>
 </file>
 
 <file path=customXml/item2.xml><?xml version="1.0" encoding="utf-8"?>
@@ -4726,17 +6158,26 @@
 </file>
 
 <file path=customXml/item3.xml><?xml version="1.0" encoding="utf-8"?>
-<p:properties xmlns:p="http://schemas.microsoft.com/office/2006/metadata/properties" xmlns:xsi="http://www.w3.org/2001/XMLSchema-instance" xmlns:pc="http://schemas.microsoft.com/office/infopath/2007/PartnerControls">
-  <documentManagement>
-    <_activity xmlns="b3641aaf-c155-40cf-a9a2-b9dc2a613d71" xsi:nil="true"/>
-  </documentManagement>
-</p:properties>
+<?mso-contentType ?>
+<FormTemplates xmlns="http://schemas.microsoft.com/sharepoint/v3/contenttype/forms">
+  <Display>DocumentLibraryForm</Display>
+  <Edit>DocumentLibraryForm</Edit>
+  <New>DocumentLibraryForm</New>
+</FormTemplates>
 </file>
 
 <file path=customXml/itemProps1.xml><?xml version="1.0" encoding="utf-8"?>
-<ds:datastoreItem xmlns:ds="http://schemas.openxmlformats.org/officeDocument/2006/customXml" ds:itemID="{6420BEFA-DD36-46DA-A023-59AFBB68ECAB}">
+<ds:datastoreItem xmlns:ds="http://schemas.openxmlformats.org/officeDocument/2006/customXml" ds:itemID="{A973A23A-97EA-4CAC-A530-BC69820D19A1}">
   <ds:schemaRefs>
-    <ds:schemaRef ds:uri="http://schemas.microsoft.com/sharepoint/v3/contenttype/forms"/>
+    <ds:schemaRef ds:uri="http://purl.org/dc/elements/1.1/"/>
+    <ds:schemaRef ds:uri="http://schemas.microsoft.com/office/2006/documentManagement/types"/>
+    <ds:schemaRef ds:uri="http://schemas.microsoft.com/office/infopath/2007/PartnerControls"/>
+    <ds:schemaRef ds:uri="http://purl.org/dc/dcmitype/"/>
+    <ds:schemaRef ds:uri="b3641aaf-c155-40cf-a9a2-b9dc2a613d71"/>
+    <ds:schemaRef ds:uri="http://schemas.openxmlformats.org/package/2006/metadata/core-properties"/>
+    <ds:schemaRef ds:uri="http://schemas.microsoft.com/office/2006/metadata/properties"/>
+    <ds:schemaRef ds:uri="http://www.w3.org/XML/1998/namespace"/>
+    <ds:schemaRef ds:uri="http://purl.org/dc/terms/"/>
   </ds:schemaRefs>
 </ds:datastoreItem>
 </file>
@@ -4760,17 +6201,9 @@
 </file>
 
 <file path=customXml/itemProps3.xml><?xml version="1.0" encoding="utf-8"?>
-<ds:datastoreItem xmlns:ds="http://schemas.openxmlformats.org/officeDocument/2006/customXml" ds:itemID="{A973A23A-97EA-4CAC-A530-BC69820D19A1}">
+<ds:datastoreItem xmlns:ds="http://schemas.openxmlformats.org/officeDocument/2006/customXml" ds:itemID="{6420BEFA-DD36-46DA-A023-59AFBB68ECAB}">
   <ds:schemaRefs>
-    <ds:schemaRef ds:uri="http://purl.org/dc/elements/1.1/"/>
-    <ds:schemaRef ds:uri="http://schemas.microsoft.com/office/2006/documentManagement/types"/>
-    <ds:schemaRef ds:uri="http://schemas.microsoft.com/office/infopath/2007/PartnerControls"/>
-    <ds:schemaRef ds:uri="http://purl.org/dc/dcmitype/"/>
-    <ds:schemaRef ds:uri="b3641aaf-c155-40cf-a9a2-b9dc2a613d71"/>
-    <ds:schemaRef ds:uri="http://schemas.openxmlformats.org/package/2006/metadata/core-properties"/>
-    <ds:schemaRef ds:uri="http://schemas.microsoft.com/office/2006/metadata/properties"/>
-    <ds:schemaRef ds:uri="http://www.w3.org/XML/1998/namespace"/>
-    <ds:schemaRef ds:uri="http://purl.org/dc/terms/"/>
+    <ds:schemaRef ds:uri="http://schemas.microsoft.com/sharepoint/v3/contenttype/forms"/>
   </ds:schemaRefs>
 </ds:datastoreItem>
 </file>
--- a/REFERENCIA/TELA_992PX.pptx
+++ b/REFERENCIA/TELA_992PX.pptx
@@ -7,6 +7,7 @@
   <p:sldIdLst>
     <p:sldId id="257" r:id="rId5"/>
     <p:sldId id="258" r:id="rId6"/>
+    <p:sldId id="259" r:id="rId7"/>
   </p:sldIdLst>
   <p:sldSz cx="9144000" cy="5143500" type="screen16x9"/>
   <p:notesSz cx="9144000" cy="6858000"/>
@@ -5658,6 +5659,121 @@
 </p:sld>
 </file>
 
+<file path=ppt/slides/slide3.xml><?xml version="1.0" encoding="utf-8"?>
+<p:sld xmlns:a="http://schemas.openxmlformats.org/drawingml/2006/main" xmlns:r="http://schemas.openxmlformats.org/officeDocument/2006/relationships" xmlns:p="http://schemas.openxmlformats.org/presentationml/2006/main">
+  <p:cSld>
+    <p:spTree>
+      <p:nvGrpSpPr>
+        <p:cNvPr id="1" name=""/>
+        <p:cNvGrpSpPr/>
+        <p:nvPr/>
+      </p:nvGrpSpPr>
+      <p:grpSpPr>
+        <a:xfrm>
+          <a:off x="0" y="0"/>
+          <a:ext cx="0" cy="0"/>
+          <a:chOff x="0" y="0"/>
+          <a:chExt cx="0" cy="0"/>
+        </a:xfrm>
+      </p:grpSpPr>
+      <p:pic>
+        <p:nvPicPr>
+          <p:cNvPr id="5" name="Imagem 4">
+            <a:extLst>
+              <a:ext uri="{FF2B5EF4-FFF2-40B4-BE49-F238E27FC236}">
+                <a16:creationId xmlns:a16="http://schemas.microsoft.com/office/drawing/2014/main" id="{A116A78F-F41F-4D8F-CBA7-8DE11CD0036E}"/>
+              </a:ext>
+            </a:extLst>
+          </p:cNvPr>
+          <p:cNvPicPr>
+            <a:picLocks noChangeAspect="1"/>
+          </p:cNvPicPr>
+          <p:nvPr/>
+        </p:nvPicPr>
+        <p:blipFill>
+          <a:blip r:embed="rId2">
+            <a:extLst>
+              <a:ext uri="{28A0092B-C50C-407E-A947-70E740481C1C}">
+                <a14:useLocalDpi xmlns:a14="http://schemas.microsoft.com/office/drawing/2010/main" val="0"/>
+              </a:ext>
+            </a:extLst>
+          </a:blip>
+          <a:stretch>
+            <a:fillRect/>
+          </a:stretch>
+        </p:blipFill>
+        <p:spPr>
+          <a:xfrm>
+            <a:off x="0" y="479614"/>
+            <a:ext cx="4995512" cy="4184272"/>
+          </a:xfrm>
+          <a:prstGeom prst="rect">
+            <a:avLst/>
+          </a:prstGeom>
+        </p:spPr>
+      </p:pic>
+      <p:sp>
+        <p:nvSpPr>
+          <p:cNvPr id="9" name="CaixaDeTexto 8">
+            <a:extLst>
+              <a:ext uri="{FF2B5EF4-FFF2-40B4-BE49-F238E27FC236}">
+                <a16:creationId xmlns:a16="http://schemas.microsoft.com/office/drawing/2014/main" id="{5B2F2F3B-5F04-51B5-299F-12098CEF85E8}"/>
+              </a:ext>
+            </a:extLst>
+          </p:cNvPr>
+          <p:cNvSpPr txBox="1"/>
+          <p:nvPr/>
+        </p:nvSpPr>
+        <p:spPr>
+          <a:xfrm>
+            <a:off x="4649002" y="324236"/>
+            <a:ext cx="4995511" cy="4339650"/>
+          </a:xfrm>
+          <a:prstGeom prst="rect">
+            <a:avLst/>
+          </a:prstGeom>
+          <a:noFill/>
+        </p:spPr>
+        <p:txBody>
+          <a:bodyPr wrap="square">
+            <a:spAutoFit/>
+          </a:bodyPr>
+          <a:lstStyle/>
+          <a:p>
+            <a:r>
+              <a:rPr lang="pt-BR" sz="13800" dirty="0">
+                <a:solidFill>
+                  <a:srgbClr val="5E1140"/>
+                </a:solidFill>
+              </a:rPr>
+              <a:t>Capi-</a:t>
+            </a:r>
+          </a:p>
+          <a:p>
+            <a:r>
+              <a:rPr lang="pt-BR" sz="13800" dirty="0">
+                <a:solidFill>
+                  <a:srgbClr val="5E1140"/>
+                </a:solidFill>
+              </a:rPr>
+              <a:t>Shop</a:t>
+            </a:r>
+          </a:p>
+        </p:txBody>
+      </p:sp>
+    </p:spTree>
+    <p:extLst>
+      <p:ext uri="{BB962C8B-B14F-4D97-AF65-F5344CB8AC3E}">
+        <p14:creationId xmlns:p14="http://schemas.microsoft.com/office/powerpoint/2010/main" val="1487065210"/>
+      </p:ext>
+    </p:extLst>
+  </p:cSld>
+  <p:clrMapOvr>
+    <a:masterClrMapping/>
+  </p:clrMapOvr>
+</p:sld>
+</file>
+
 <file path=ppt/theme/theme1.xml><?xml version="1.0" encoding="utf-8"?>
 <a:theme xmlns:a="http://schemas.openxmlformats.org/drawingml/2006/main" name="Tema do Office">
   <a:themeElements>
@@ -5982,6 +6098,15 @@
 </file>
 
 <file path=customXml/item2.xml><?xml version="1.0" encoding="utf-8"?>
+<?mso-contentType ?>
+<FormTemplates xmlns="http://schemas.microsoft.com/sharepoint/v3/contenttype/forms">
+  <Display>DocumentLibraryForm</Display>
+  <Edit>DocumentLibraryForm</Edit>
+  <New>DocumentLibraryForm</New>
+</FormTemplates>
+</file>
+
+<file path=customXml/item3.xml><?xml version="1.0" encoding="utf-8"?>
 <ct:contentTypeSchema xmlns:ct="http://schemas.microsoft.com/office/2006/metadata/contentType" xmlns:ma="http://schemas.microsoft.com/office/2006/metadata/properties/metaAttributes" ct:_="" ma:_="" ma:contentTypeName="Documento" ma:contentTypeID="0x01010097C5949BA8B38C40AFE0035821DE2402" ma:contentTypeVersion="9" ma:contentTypeDescription="Crie um novo documento." ma:contentTypeScope="" ma:versionID="3226b4a9685c0b3929e4091bf87bbdeb">
   <xsd:schema xmlns:xsd="http://www.w3.org/2001/XMLSchema" xmlns:xs="http://www.w3.org/2001/XMLSchema" xmlns:p="http://schemas.microsoft.com/office/2006/metadata/properties" xmlns:ns3="b3641aaf-c155-40cf-a9a2-b9dc2a613d71" targetNamespace="http://schemas.microsoft.com/office/2006/metadata/properties" ma:root="true" ma:fieldsID="a53cdf1f744150a8b939837411c012eb" ns3:_="">
     <xsd:import namespace="b3641aaf-c155-40cf-a9a2-b9dc2a613d71"/>
@@ -6157,15 +6282,6 @@
 </ct:contentTypeSchema>
 </file>
 
-<file path=customXml/item3.xml><?xml version="1.0" encoding="utf-8"?>
-<?mso-contentType ?>
-<FormTemplates xmlns="http://schemas.microsoft.com/sharepoint/v3/contenttype/forms">
-  <Display>DocumentLibraryForm</Display>
-  <Edit>DocumentLibraryForm</Edit>
-  <New>DocumentLibraryForm</New>
-</FormTemplates>
-</file>
-
 <file path=customXml/itemProps1.xml><?xml version="1.0" encoding="utf-8"?>
 <ds:datastoreItem xmlns:ds="http://schemas.openxmlformats.org/officeDocument/2006/customXml" ds:itemID="{A973A23A-97EA-4CAC-A530-BC69820D19A1}">
   <ds:schemaRefs>
@@ -6183,6 +6299,14 @@
 </file>
 
 <file path=customXml/itemProps2.xml><?xml version="1.0" encoding="utf-8"?>
+<ds:datastoreItem xmlns:ds="http://schemas.openxmlformats.org/officeDocument/2006/customXml" ds:itemID="{6420BEFA-DD36-46DA-A023-59AFBB68ECAB}">
+  <ds:schemaRefs>
+    <ds:schemaRef ds:uri="http://schemas.microsoft.com/sharepoint/v3/contenttype/forms"/>
+  </ds:schemaRefs>
+</ds:datastoreItem>
+</file>
+
+<file path=customXml/itemProps3.xml><?xml version="1.0" encoding="utf-8"?>
 <ds:datastoreItem xmlns:ds="http://schemas.openxmlformats.org/officeDocument/2006/customXml" ds:itemID="{FE97C7FA-863A-4C71-B82E-E757D0A2C222}">
   <ds:schemaRefs>
     <ds:schemaRef ds:uri="http://schemas.microsoft.com/office/2006/metadata/contentType"/>
@@ -6198,12 +6322,4 @@
     <ds:schemaRef ds:uri="http://schemas.microsoft.com/internal/obd"/>
   </ds:schemaRefs>
 </ds:datastoreItem>
-</file>
-
-<file path=customXml/itemProps3.xml><?xml version="1.0" encoding="utf-8"?>
-<ds:datastoreItem xmlns:ds="http://schemas.openxmlformats.org/officeDocument/2006/customXml" ds:itemID="{6420BEFA-DD36-46DA-A023-59AFBB68ECAB}">
-  <ds:schemaRefs>
-    <ds:schemaRef ds:uri="http://schemas.microsoft.com/sharepoint/v3/contenttype/forms"/>
-  </ds:schemaRefs>
-</ds:datastoreItem>
 </file>
--- a/REFERENCIA/TELA_992PX.pptx
+++ b/REFERENCIA/TELA_992PX.pptx
@@ -266,7 +266,7 @@
           <a:p>
             <a:fld id="{D85FC7F7-0F0C-4FDD-BE35-671CC056ECDE}" type="datetimeFigureOut">
               <a:rPr lang="pt-BR" smtClean="0"/>
-              <a:t>23/06/2026</a:t>
+              <a:t>25/06/2026</a:t>
             </a:fld>
             <a:endParaRPr lang="pt-BR"/>
           </a:p>
@@ -436,7 +436,7 @@
           <a:p>
             <a:fld id="{D85FC7F7-0F0C-4FDD-BE35-671CC056ECDE}" type="datetimeFigureOut">
               <a:rPr lang="pt-BR" smtClean="0"/>
-              <a:t>23/06/2026</a:t>
+              <a:t>25/06/2026</a:t>
             </a:fld>
             <a:endParaRPr lang="pt-BR"/>
           </a:p>
@@ -616,7 +616,7 @@
           <a:p>
             <a:fld id="{D85FC7F7-0F0C-4FDD-BE35-671CC056ECDE}" type="datetimeFigureOut">
               <a:rPr lang="pt-BR" smtClean="0"/>
-              <a:t>23/06/2026</a:t>
+              <a:t>25/06/2026</a:t>
             </a:fld>
             <a:endParaRPr lang="pt-BR"/>
           </a:p>
@@ -786,7 +786,7 @@
           <a:p>
             <a:fld id="{D85FC7F7-0F0C-4FDD-BE35-671CC056ECDE}" type="datetimeFigureOut">
               <a:rPr lang="pt-BR" smtClean="0"/>
-              <a:t>23/06/2026</a:t>
+              <a:t>25/06/2026</a:t>
             </a:fld>
             <a:endParaRPr lang="pt-BR"/>
           </a:p>
@@ -1032,7 +1032,7 @@
           <a:p>
             <a:fld id="{D85FC7F7-0F0C-4FDD-BE35-671CC056ECDE}" type="datetimeFigureOut">
               <a:rPr lang="pt-BR" smtClean="0"/>
-              <a:t>23/06/2026</a:t>
+              <a:t>25/06/2026</a:t>
             </a:fld>
             <a:endParaRPr lang="pt-BR"/>
           </a:p>
@@ -1264,7 +1264,7 @@
           <a:p>
             <a:fld id="{D85FC7F7-0F0C-4FDD-BE35-671CC056ECDE}" type="datetimeFigureOut">
               <a:rPr lang="pt-BR" smtClean="0"/>
-              <a:t>23/06/2026</a:t>
+              <a:t>25/06/2026</a:t>
             </a:fld>
             <a:endParaRPr lang="pt-BR"/>
           </a:p>
@@ -1631,7 +1631,7 @@
           <a:p>
             <a:fld id="{D85FC7F7-0F0C-4FDD-BE35-671CC056ECDE}" type="datetimeFigureOut">
               <a:rPr lang="pt-BR" smtClean="0"/>
-              <a:t>23/06/2026</a:t>
+              <a:t>25/06/2026</a:t>
             </a:fld>
             <a:endParaRPr lang="pt-BR"/>
           </a:p>
@@ -1749,7 +1749,7 @@
           <a:p>
             <a:fld id="{D85FC7F7-0F0C-4FDD-BE35-671CC056ECDE}" type="datetimeFigureOut">
               <a:rPr lang="pt-BR" smtClean="0"/>
-              <a:t>23/06/2026</a:t>
+              <a:t>25/06/2026</a:t>
             </a:fld>
             <a:endParaRPr lang="pt-BR"/>
           </a:p>
@@ -1844,7 +1844,7 @@
           <a:p>
             <a:fld id="{D85FC7F7-0F0C-4FDD-BE35-671CC056ECDE}" type="datetimeFigureOut">
               <a:rPr lang="pt-BR" smtClean="0"/>
-              <a:t>23/06/2026</a:t>
+              <a:t>25/06/2026</a:t>
             </a:fld>
             <a:endParaRPr lang="pt-BR"/>
           </a:p>
@@ -2121,7 +2121,7 @@
           <a:p>
             <a:fld id="{D85FC7F7-0F0C-4FDD-BE35-671CC056ECDE}" type="datetimeFigureOut">
               <a:rPr lang="pt-BR" smtClean="0"/>
-              <a:t>23/06/2026</a:t>
+              <a:t>25/06/2026</a:t>
             </a:fld>
             <a:endParaRPr lang="pt-BR"/>
           </a:p>
@@ -2378,7 +2378,7 @@
           <a:p>
             <a:fld id="{D85FC7F7-0F0C-4FDD-BE35-671CC056ECDE}" type="datetimeFigureOut">
               <a:rPr lang="pt-BR" smtClean="0"/>
-              <a:t>23/06/2026</a:t>
+              <a:t>25/06/2026</a:t>
             </a:fld>
             <a:endParaRPr lang="pt-BR"/>
           </a:p>
@@ -2591,7 +2591,7 @@
           <a:p>
             <a:fld id="{D85FC7F7-0F0C-4FDD-BE35-671CC056ECDE}" type="datetimeFigureOut">
               <a:rPr lang="pt-BR" smtClean="0"/>
-              <a:t>23/06/2026</a:t>
+              <a:t>25/06/2026</a:t>
             </a:fld>
             <a:endParaRPr lang="pt-BR"/>
           </a:p>
@@ -5676,6 +5676,60 @@
           <a:chExt cx="0" cy="0"/>
         </a:xfrm>
       </p:grpSpPr>
+      <p:sp>
+        <p:nvSpPr>
+          <p:cNvPr id="2" name="Elipse 1">
+            <a:extLst>
+              <a:ext uri="{FF2B5EF4-FFF2-40B4-BE49-F238E27FC236}">
+                <a16:creationId xmlns:a16="http://schemas.microsoft.com/office/drawing/2014/main" id="{6CC8BD7D-C702-E31D-BA88-2567D5DE656B}"/>
+              </a:ext>
+            </a:extLst>
+          </p:cNvPr>
+          <p:cNvSpPr/>
+          <p:nvPr/>
+        </p:nvSpPr>
+        <p:spPr>
+          <a:xfrm>
+            <a:off x="-192157" y="974035"/>
+            <a:ext cx="384313" cy="351182"/>
+          </a:xfrm>
+          <a:prstGeom prst="ellipse">
+            <a:avLst/>
+          </a:prstGeom>
+          <a:solidFill>
+            <a:srgbClr val="CDAC8A"/>
+          </a:solidFill>
+          <a:ln>
+            <a:solidFill>
+              <a:srgbClr val="5C113E"/>
+            </a:solidFill>
+          </a:ln>
+        </p:spPr>
+        <p:style>
+          <a:lnRef idx="2">
+            <a:schemeClr val="accent1">
+              <a:shade val="15000"/>
+            </a:schemeClr>
+          </a:lnRef>
+          <a:fillRef idx="1">
+            <a:schemeClr val="accent1"/>
+          </a:fillRef>
+          <a:effectRef idx="0">
+            <a:schemeClr val="accent1"/>
+          </a:effectRef>
+          <a:fontRef idx="minor">
+            <a:schemeClr val="lt1"/>
+          </a:fontRef>
+        </p:style>
+        <p:txBody>
+          <a:bodyPr rtlCol="0" anchor="ctr"/>
+          <a:lstStyle/>
+          <a:p>
+            <a:pPr algn="ctr"/>
+            <a:endParaRPr lang="pt-BR"/>
+          </a:p>
+        </p:txBody>
+      </p:sp>
       <p:pic>
         <p:nvPicPr>
           <p:cNvPr id="5" name="Imagem 4">
@@ -5691,21 +5745,13 @@
           <p:nvPr/>
         </p:nvPicPr>
         <p:blipFill>
-          <a:blip r:embed="rId2">
-            <a:extLst>
-              <a:ext uri="{28A0092B-C50C-407E-A947-70E740481C1C}">
-                <a14:useLocalDpi xmlns:a14="http://schemas.microsoft.com/office/drawing/2010/main" val="0"/>
-              </a:ext>
-            </a:extLst>
-          </a:blip>
-          <a:stretch>
-            <a:fillRect/>
-          </a:stretch>
+          <a:blip r:embed="rId2"/>
+          <a:stretch/>
         </p:blipFill>
         <p:spPr>
           <a:xfrm>
-            <a:off x="0" y="479614"/>
-            <a:ext cx="4995512" cy="4184272"/>
+            <a:off x="2" y="479614"/>
+            <a:ext cx="4995508" cy="4184272"/>
           </a:xfrm>
           <a:prstGeom prst="rect">
             <a:avLst/>
@@ -5758,6 +5804,60 @@
               </a:rPr>
               <a:t>Shop</a:t>
             </a:r>
+          </a:p>
+        </p:txBody>
+      </p:sp>
+      <p:sp>
+        <p:nvSpPr>
+          <p:cNvPr id="3" name="Elipse 2">
+            <a:extLst>
+              <a:ext uri="{FF2B5EF4-FFF2-40B4-BE49-F238E27FC236}">
+                <a16:creationId xmlns:a16="http://schemas.microsoft.com/office/drawing/2014/main" id="{F57376B9-EE1B-2B58-8F02-7AC27D1A7D5E}"/>
+              </a:ext>
+            </a:extLst>
+          </p:cNvPr>
+          <p:cNvSpPr/>
+          <p:nvPr/>
+        </p:nvSpPr>
+        <p:spPr>
+          <a:xfrm>
+            <a:off x="-589722" y="1530626"/>
+            <a:ext cx="384313" cy="351182"/>
+          </a:xfrm>
+          <a:prstGeom prst="ellipse">
+            <a:avLst/>
+          </a:prstGeom>
+          <a:solidFill>
+            <a:srgbClr val="F0EDCC"/>
+          </a:solidFill>
+          <a:ln>
+            <a:solidFill>
+              <a:srgbClr val="5C113E"/>
+            </a:solidFill>
+          </a:ln>
+        </p:spPr>
+        <p:style>
+          <a:lnRef idx="2">
+            <a:schemeClr val="accent1">
+              <a:shade val="15000"/>
+            </a:schemeClr>
+          </a:lnRef>
+          <a:fillRef idx="1">
+            <a:schemeClr val="accent1"/>
+          </a:fillRef>
+          <a:effectRef idx="0">
+            <a:schemeClr val="accent1"/>
+          </a:effectRef>
+          <a:fontRef idx="minor">
+            <a:schemeClr val="lt1"/>
+          </a:fontRef>
+        </p:style>
+        <p:txBody>
+          <a:bodyPr rtlCol="0" anchor="ctr"/>
+          <a:lstStyle/>
+          <a:p>
+            <a:pPr algn="ctr"/>
+            <a:endParaRPr lang="pt-BR"/>
           </a:p>
         </p:txBody>
       </p:sp>
@@ -6090,20 +6190,20 @@
 </file>
 
 <file path=customXml/item1.xml><?xml version="1.0" encoding="utf-8"?>
-<p:properties xmlns:p="http://schemas.microsoft.com/office/2006/metadata/properties" xmlns:xsi="http://www.w3.org/2001/XMLSchema-instance" xmlns:pc="http://schemas.microsoft.com/office/infopath/2007/PartnerControls">
-  <documentManagement>
-    <_activity xmlns="b3641aaf-c155-40cf-a9a2-b9dc2a613d71" xsi:nil="true"/>
-  </documentManagement>
-</p:properties>
-</file>
-
-<file path=customXml/item2.xml><?xml version="1.0" encoding="utf-8"?>
 <?mso-contentType ?>
 <FormTemplates xmlns="http://schemas.microsoft.com/sharepoint/v3/contenttype/forms">
   <Display>DocumentLibraryForm</Display>
   <Edit>DocumentLibraryForm</Edit>
   <New>DocumentLibraryForm</New>
 </FormTemplates>
+</file>
+
+<file path=customXml/item2.xml><?xml version="1.0" encoding="utf-8"?>
+<p:properties xmlns:p="http://schemas.microsoft.com/office/2006/metadata/properties" xmlns:xsi="http://www.w3.org/2001/XMLSchema-instance" xmlns:pc="http://schemas.microsoft.com/office/infopath/2007/PartnerControls">
+  <documentManagement>
+    <_activity xmlns="b3641aaf-c155-40cf-a9a2-b9dc2a613d71" xsi:nil="true"/>
+  </documentManagement>
+</p:properties>
 </file>
 
 <file path=customXml/item3.xml><?xml version="1.0" encoding="utf-8"?>
@@ -6283,6 +6383,14 @@
 </file>
 
 <file path=customXml/itemProps1.xml><?xml version="1.0" encoding="utf-8"?>
+<ds:datastoreItem xmlns:ds="http://schemas.openxmlformats.org/officeDocument/2006/customXml" ds:itemID="{6420BEFA-DD36-46DA-A023-59AFBB68ECAB}">
+  <ds:schemaRefs>
+    <ds:schemaRef ds:uri="http://schemas.microsoft.com/sharepoint/v3/contenttype/forms"/>
+  </ds:schemaRefs>
+</ds:datastoreItem>
+</file>
+
+<file path=customXml/itemProps2.xml><?xml version="1.0" encoding="utf-8"?>
 <ds:datastoreItem xmlns:ds="http://schemas.openxmlformats.org/officeDocument/2006/customXml" ds:itemID="{A973A23A-97EA-4CAC-A530-BC69820D19A1}">
   <ds:schemaRefs>
     <ds:schemaRef ds:uri="http://purl.org/dc/elements/1.1/"/>
@@ -6294,14 +6402,6 @@
     <ds:schemaRef ds:uri="http://schemas.microsoft.com/office/2006/metadata/properties"/>
     <ds:schemaRef ds:uri="http://www.w3.org/XML/1998/namespace"/>
     <ds:schemaRef ds:uri="http://purl.org/dc/terms/"/>
-  </ds:schemaRefs>
-</ds:datastoreItem>
-</file>
-
-<file path=customXml/itemProps2.xml><?xml version="1.0" encoding="utf-8"?>
-<ds:datastoreItem xmlns:ds="http://schemas.openxmlformats.org/officeDocument/2006/customXml" ds:itemID="{6420BEFA-DD36-46DA-A023-59AFBB68ECAB}">
-  <ds:schemaRefs>
-    <ds:schemaRef ds:uri="http://schemas.microsoft.com/sharepoint/v3/contenttype/forms"/>
   </ds:schemaRefs>
 </ds:datastoreItem>
 </file>
